--- a/Slides/Week8_Logistics.pptx
+++ b/Slides/Week8_Logistics.pptx
@@ -8714,13 +8714,13 @@
   <p:clrMapOvr>
     <a:masterClrMapping/>
   </p:clrMapOvr>
-  <mc:AlternateContent xmlns:mc="http://schemas.openxmlformats.org/markup-compatibility/2006">
-    <mc:Choice xmlns:p14="http://schemas.microsoft.com/office/powerpoint/2010/main" Requires="p14">
+  <mc:AlternateContent xmlns:mc="http://schemas.openxmlformats.org/markup-compatibility/2006" xmlns:p14="http://schemas.microsoft.com/office/powerpoint/2010/main">
+    <mc:Choice Requires="p14">
       <p:transition spd="med" p14:dur="700">
         <p:fade/>
       </p:transition>
     </mc:Choice>
-    <mc:Fallback>
+    <mc:Fallback xmlns="">
       <p:transition spd="med">
         <p:fade/>
       </p:transition>
@@ -9161,13 +9161,13 @@
   <p:clrMapOvr>
     <a:masterClrMapping/>
   </p:clrMapOvr>
-  <mc:AlternateContent xmlns:mc="http://schemas.openxmlformats.org/markup-compatibility/2006">
-    <mc:Choice xmlns:p14="http://schemas.microsoft.com/office/powerpoint/2010/main" Requires="p14">
+  <mc:AlternateContent xmlns:mc="http://schemas.openxmlformats.org/markup-compatibility/2006" xmlns:p14="http://schemas.microsoft.com/office/powerpoint/2010/main">
+    <mc:Choice Requires="p14">
       <p:transition spd="med" p14:dur="700">
         <p:fade/>
       </p:transition>
     </mc:Choice>
-    <mc:Fallback>
+    <mc:Fallback xmlns="">
       <p:transition spd="med">
         <p:fade/>
       </p:transition>
@@ -9585,13 +9585,13 @@
   <p:clrMapOvr>
     <a:masterClrMapping/>
   </p:clrMapOvr>
-  <mc:AlternateContent xmlns:mc="http://schemas.openxmlformats.org/markup-compatibility/2006">
-    <mc:Choice xmlns:p14="http://schemas.microsoft.com/office/powerpoint/2010/main" Requires="p14">
+  <mc:AlternateContent xmlns:mc="http://schemas.openxmlformats.org/markup-compatibility/2006" xmlns:p14="http://schemas.microsoft.com/office/powerpoint/2010/main">
+    <mc:Choice Requires="p14">
       <p:transition spd="med" p14:dur="700">
         <p:fade/>
       </p:transition>
     </mc:Choice>
-    <mc:Fallback>
+    <mc:Fallback xmlns="">
       <p:transition spd="med">
         <p:fade/>
       </p:transition>
@@ -9830,13 +9830,13 @@
   <p:clrMapOvr>
     <a:masterClrMapping/>
   </p:clrMapOvr>
-  <mc:AlternateContent xmlns:mc="http://schemas.openxmlformats.org/markup-compatibility/2006">
-    <mc:Choice xmlns:p14="http://schemas.microsoft.com/office/powerpoint/2010/main" Requires="p14">
+  <mc:AlternateContent xmlns:mc="http://schemas.openxmlformats.org/markup-compatibility/2006" xmlns:p14="http://schemas.microsoft.com/office/powerpoint/2010/main">
+    <mc:Choice Requires="p14">
       <p:transition spd="med" p14:dur="700">
         <p:fade/>
       </p:transition>
     </mc:Choice>
-    <mc:Fallback>
+    <mc:Fallback xmlns="">
       <p:transition spd="med">
         <p:fade/>
       </p:transition>
@@ -9982,13 +9982,13 @@
   <p:clrMapOvr>
     <a:masterClrMapping/>
   </p:clrMapOvr>
-  <mc:AlternateContent xmlns:mc="http://schemas.openxmlformats.org/markup-compatibility/2006">
-    <mc:Choice xmlns:p14="http://schemas.microsoft.com/office/powerpoint/2010/main" Requires="p14">
+  <mc:AlternateContent xmlns:mc="http://schemas.openxmlformats.org/markup-compatibility/2006" xmlns:p14="http://schemas.microsoft.com/office/powerpoint/2010/main">
+    <mc:Choice Requires="p14">
       <p:transition spd="med" p14:dur="700">
         <p:fade/>
       </p:transition>
     </mc:Choice>
-    <mc:Fallback>
+    <mc:Fallback xmlns="">
       <p:transition spd="med">
         <p:fade/>
       </p:transition>
@@ -10189,13 +10189,13 @@
   <p:clrMapOvr>
     <a:masterClrMapping/>
   </p:clrMapOvr>
-  <mc:AlternateContent xmlns:mc="http://schemas.openxmlformats.org/markup-compatibility/2006">
-    <mc:Choice xmlns:p14="http://schemas.microsoft.com/office/powerpoint/2010/main" Requires="p14">
+  <mc:AlternateContent xmlns:mc="http://schemas.openxmlformats.org/markup-compatibility/2006" xmlns:p14="http://schemas.microsoft.com/office/powerpoint/2010/main">
+    <mc:Choice Requires="p14">
       <p:transition spd="med" p14:dur="700">
         <p:fade/>
       </p:transition>
     </mc:Choice>
-    <mc:Fallback>
+    <mc:Fallback xmlns="">
       <p:transition spd="med">
         <p:fade/>
       </p:transition>
@@ -10436,13 +10436,13 @@
   <p:clrMapOvr>
     <a:masterClrMapping/>
   </p:clrMapOvr>
-  <mc:AlternateContent xmlns:mc="http://schemas.openxmlformats.org/markup-compatibility/2006">
-    <mc:Choice xmlns:p14="http://schemas.microsoft.com/office/powerpoint/2010/main" Requires="p14">
+  <mc:AlternateContent xmlns:mc="http://schemas.openxmlformats.org/markup-compatibility/2006" xmlns:p14="http://schemas.microsoft.com/office/powerpoint/2010/main">
+    <mc:Choice Requires="p14">
       <p:transition spd="med" p14:dur="700">
         <p:fade/>
       </p:transition>
     </mc:Choice>
-    <mc:Fallback>
+    <mc:Fallback xmlns="">
       <p:transition spd="med">
         <p:fade/>
       </p:transition>
@@ -10795,13 +10795,13 @@
   <p:clrMapOvr>
     <a:masterClrMapping/>
   </p:clrMapOvr>
-  <mc:AlternateContent xmlns:mc="http://schemas.openxmlformats.org/markup-compatibility/2006">
-    <mc:Choice xmlns:p14="http://schemas.microsoft.com/office/powerpoint/2010/main" Requires="p14">
+  <mc:AlternateContent xmlns:mc="http://schemas.openxmlformats.org/markup-compatibility/2006" xmlns:p14="http://schemas.microsoft.com/office/powerpoint/2010/main">
+    <mc:Choice Requires="p14">
       <p:transition spd="med" p14:dur="700">
         <p:fade/>
       </p:transition>
     </mc:Choice>
-    <mc:Fallback>
+    <mc:Fallback xmlns="">
       <p:transition spd="med">
         <p:fade/>
       </p:transition>
